--- a/dist/초3/수학/자연수계산/초3_수학_자연수계산_01_세자리수의덧셈.pptx
+++ b/dist/초3/수학/자연수계산/초3_수학_자연수계산_01_세자리수의덧셈.pptx
@@ -121,13 +121,13 @@
   <p:extLst>
     <p:ext uri="{521415D9-36F7-43E2-AB2F-B90AF26B5E84}">
       <p14:sectionLst xmlns:p14="http://schemas.microsoft.com/office/powerpoint/2010/main">
-        <p14:section name="도입" id="{f1144932-cda9-4648-0f83-f88687718fce}">
+        <p14:section name="도입" id="{f73010cc-dd17-003b-d4c5-f320a533e564}">
           <p14:sldIdLst>
             <p14:sldId id="256"/>
             <p14:sldId id="257"/>
           </p14:sldIdLst>
         </p14:section>
-        <p14:section name="개념" id="{85f7ca8c-c457-bd8f-c958-b8f4e6373f88}">
+        <p14:section name="개념" id="{5a2d54e0-f1da-2695-7fe3-9867b6d27771}">
           <p14:sldIdLst>
             <p14:sldId id="258"/>
             <p14:sldId id="259"/>
@@ -136,32 +136,32 @@
             <p14:sldId id="264"/>
           </p14:sldIdLst>
         </p14:section>
-        <p14:section name="연습" id="{25f4016a-da4a-a1a1-3134-cf6e9487ed88}">
+        <p14:section name="연습" id="{e6fe43db-9cdf-dbeb-7013-06eba43e911d}">
           <p14:sldIdLst>
             <p14:sldId id="262"/>
             <p14:sldId id="263"/>
             <p14:sldId id="265"/>
           </p14:sldIdLst>
         </p14:section>
-        <p14:section name="개념" id="{c01578a7-54a4-9dcc-fea9-b49fd17ce170}">
+        <p14:section name="개념" id="{fd7286e0-11ab-b0ec-2572-714fc3e1ab53}">
           <p14:sldIdLst/>
         </p14:section>
-        <p14:section name="연습" id="{cb6314a8-60b9-19f9-7c89-86376e149f99}">
+        <p14:section name="연습" id="{e04221bb-6a60-e8ca-cf0b-bb068087d024}">
           <p14:sldIdLst/>
         </p14:section>
-        <p14:section name="확인" id="{1592a219-c1a8-bc3a-8797-4f06f6f6f701}">
+        <p14:section name="확인" id="{b6cb1cb8-cf3e-3782-30d6-e2089dff090e}">
           <p14:sldIdLst>
             <p14:sldId id="266"/>
             <p14:sldId id="267"/>
             <p14:sldId id="268"/>
           </p14:sldIdLst>
         </p14:section>
-        <p14:section name="정리" id="{70ad0d7f-7252-6b64-81b5-79ec069bf313}">
+        <p14:section name="정리" id="{68244505-660b-5b2b-b0c2-b77d0c604787}">
           <p14:sldIdLst>
             <p14:sldId id="269"/>
           </p14:sldIdLst>
         </p14:section>
-        <p14:section name="보충" id="{134a12fb-4901-47f8-4620-f183e83a0d60}">
+        <p14:section name="보충" id="{d97aba25-d7fc-0e40-f585-c2700b6a8c99}">
           <p14:sldIdLst>
             <p14:sldId id="270"/>
           </p14:sldIdLst>
@@ -3139,7 +3139,7 @@
           </p:nvPr>
         </p:nvGraphicFramePr>
         <p:xfrm>
-          <a:off x="7726680" y="965200"/>
+          <a:off x="7726680" y="1000760"/>
           <a:ext cx="3840480" cy="914400"/>
         </p:xfrm>
         <a:graphic>
@@ -3152,7 +3152,7 @@
                 <a:gridCol w="960120"/>
                 <a:gridCol w="960120"/>
               </a:tblGrid>
-              <a:tr h="568960">
+              <a:tr h="551180">
                 <a:tc>
                   <a:txBody>
                     <a:bodyPr/>
@@ -3415,7 +3415,7 @@
                   </a:tcPr>
                 </a:tc>
               </a:tr>
-              <a:tr h="568960">
+              <a:tr h="551180">
                 <a:tc>
                   <a:txBody>
                     <a:bodyPr/>
@@ -3678,7 +3678,7 @@
                   </a:tcPr>
                 </a:tc>
               </a:tr>
-              <a:tr h="568960">
+              <a:tr h="551180">
                 <a:tc>
                   <a:txBody>
                     <a:bodyPr/>
@@ -3952,7 +3952,7 @@
                   </a:tcPr>
                 </a:tc>
               </a:tr>
-              <a:tr h="568960">
+              <a:tr h="551180">
                 <a:tc>
                   <a:txBody>
                     <a:bodyPr/>
@@ -7225,7 +7225,7 @@
           </p:nvPr>
         </p:nvGraphicFramePr>
         <p:xfrm>
-          <a:off x="8063728" y="2042160"/>
+          <a:off x="8063728" y="2089785"/>
           <a:ext cx="3291840" cy="914400"/>
         </p:xfrm>
         <a:graphic>
@@ -7237,7 +7237,7 @@
                 <a:gridCol w="1097280"/>
                 <a:gridCol w="1097280"/>
               </a:tblGrid>
-              <a:tr h="609600">
+              <a:tr h="590550">
                 <a:tc>
                   <a:txBody>
                     <a:bodyPr/>
@@ -7432,7 +7432,7 @@
                   </a:tcPr>
                 </a:tc>
               </a:tr>
-              <a:tr h="609600">
+              <a:tr h="590550">
                 <a:tc>
                   <a:txBody>
                     <a:bodyPr/>
@@ -7616,7 +7616,7 @@
                   </a:tcPr>
                 </a:tc>
               </a:tr>
-              <a:tr h="609600">
+              <a:tr h="590550">
                 <a:tc>
                   <a:txBody>
                     <a:bodyPr/>
@@ -7811,7 +7811,7 @@
                   </a:tcPr>
                 </a:tc>
               </a:tr>
-              <a:tr h="609600">
+              <a:tr h="590550">
                 <a:tc>
                   <a:txBody>
                     <a:bodyPr/>
@@ -8017,7 +8017,7 @@
                   </a:tcPr>
                 </a:tc>
               </a:tr>
-              <a:tr h="609600">
+              <a:tr h="590550">
                 <a:tc>
                   <a:txBody>
                     <a:bodyPr/>
@@ -9114,7 +9114,7 @@
           </p:nvPr>
         </p:nvGraphicFramePr>
         <p:xfrm>
-          <a:off x="2253996" y="2058670"/>
+          <a:off x="2253996" y="2099945"/>
           <a:ext cx="7680960" cy="914400"/>
         </p:xfrm>
         <a:graphic>
@@ -9127,7 +9127,7 @@
                 <a:gridCol w="1920240"/>
                 <a:gridCol w="1920240"/>
               </a:tblGrid>
-              <a:tr h="528320">
+              <a:tr h="511810">
                 <a:tc>
                   <a:txBody>
                     <a:bodyPr/>
@@ -9390,7 +9390,7 @@
                   </a:tcPr>
                 </a:tc>
               </a:tr>
-              <a:tr h="528320">
+              <a:tr h="511810">
                 <a:tc>
                   <a:txBody>
                     <a:bodyPr/>
@@ -9664,7 +9664,7 @@
                   </a:tcPr>
                 </a:tc>
               </a:tr>
-              <a:tr h="528320">
+              <a:tr h="511810">
                 <a:tc>
                   <a:txBody>
                     <a:bodyPr/>
@@ -9938,7 +9938,7 @@
                   </a:tcPr>
                 </a:tc>
               </a:tr>
-              <a:tr h="528320">
+              <a:tr h="511810">
                 <a:tc>
                   <a:txBody>
                     <a:bodyPr/>
@@ -10212,7 +10212,7 @@
                   </a:tcPr>
                 </a:tc>
               </a:tr>
-              <a:tr h="528320">
+              <a:tr h="511810">
                 <a:tc>
                   <a:txBody>
                     <a:bodyPr/>
@@ -10727,7 +10727,7 @@
           </p:nvPr>
         </p:nvGraphicFramePr>
         <p:xfrm>
-          <a:off x="7483450" y="2042160"/>
+          <a:off x="7483450" y="2089785"/>
           <a:ext cx="4023360" cy="914400"/>
         </p:xfrm>
         <a:graphic>
@@ -10740,7 +10740,7 @@
                 <a:gridCol w="1005840"/>
                 <a:gridCol w="1005840"/>
               </a:tblGrid>
-              <a:tr h="609600">
+              <a:tr h="590550">
                 <a:tc>
                   <a:txBody>
                     <a:bodyPr/>
@@ -11003,7 +11003,7 @@
                   </a:tcPr>
                 </a:tc>
               </a:tr>
-              <a:tr h="609600">
+              <a:tr h="590550">
                 <a:tc>
                   <a:txBody>
                     <a:bodyPr/>
@@ -11244,7 +11244,7 @@
                   </a:tcPr>
                 </a:tc>
               </a:tr>
-              <a:tr h="609600">
+              <a:tr h="590550">
                 <a:tc>
                   <a:txBody>
                     <a:bodyPr/>
@@ -11507,7 +11507,7 @@
                   </a:tcPr>
                 </a:tc>
               </a:tr>
-              <a:tr h="609600">
+              <a:tr h="590550">
                 <a:tc>
                   <a:txBody>
                     <a:bodyPr/>
@@ -11781,7 +11781,7 @@
                   </a:tcPr>
                 </a:tc>
               </a:tr>
-              <a:tr h="609600">
+              <a:tr h="590550">
                 <a:tc>
                   <a:txBody>
                     <a:bodyPr/>
@@ -12554,7 +12554,7 @@
           </p:nvPr>
         </p:nvGraphicFramePr>
         <p:xfrm>
-          <a:off x="7483450" y="2042160"/>
+          <a:off x="7483450" y="2089785"/>
           <a:ext cx="4023360" cy="914400"/>
         </p:xfrm>
         <a:graphic>
@@ -12567,7 +12567,7 @@
                 <a:gridCol w="1005840"/>
                 <a:gridCol w="1005840"/>
               </a:tblGrid>
-              <a:tr h="609600">
+              <a:tr h="590550">
                 <a:tc>
                   <a:txBody>
                     <a:bodyPr/>
@@ -12830,7 +12830,7 @@
                   </a:tcPr>
                 </a:tc>
               </a:tr>
-              <a:tr h="609600">
+              <a:tr h="590550">
                 <a:tc>
                   <a:txBody>
                     <a:bodyPr/>
@@ -13071,7 +13071,7 @@
                   </a:tcPr>
                 </a:tc>
               </a:tr>
-              <a:tr h="609600">
+              <a:tr h="590550">
                 <a:tc>
                   <a:txBody>
                     <a:bodyPr/>
@@ -13334,7 +13334,7 @@
                   </a:tcPr>
                 </a:tc>
               </a:tr>
-              <a:tr h="609600">
+              <a:tr h="590550">
                 <a:tc>
                   <a:txBody>
                     <a:bodyPr/>
@@ -13608,7 +13608,7 @@
                   </a:tcPr>
                 </a:tc>
               </a:tr>
-              <a:tr h="609600">
+              <a:tr h="590550">
                 <a:tc>
                   <a:txBody>
                     <a:bodyPr/>
@@ -14381,7 +14381,7 @@
           </p:nvPr>
         </p:nvGraphicFramePr>
         <p:xfrm>
-          <a:off x="7483450" y="2042160"/>
+          <a:off x="7483450" y="2089785"/>
           <a:ext cx="4023360" cy="914400"/>
         </p:xfrm>
         <a:graphic>
@@ -14394,7 +14394,7 @@
                 <a:gridCol w="1005840"/>
                 <a:gridCol w="1005840"/>
               </a:tblGrid>
-              <a:tr h="609600">
+              <a:tr h="590550">
                 <a:tc>
                   <a:txBody>
                     <a:bodyPr/>
@@ -14657,7 +14657,7 @@
                   </a:tcPr>
                 </a:tc>
               </a:tr>
-              <a:tr h="609600">
+              <a:tr h="590550">
                 <a:tc>
                   <a:txBody>
                     <a:bodyPr/>
@@ -14909,7 +14909,7 @@
                   </a:tcPr>
                 </a:tc>
               </a:tr>
-              <a:tr h="609600">
+              <a:tr h="590550">
                 <a:tc>
                   <a:txBody>
                     <a:bodyPr/>
@@ -15172,7 +15172,7 @@
                   </a:tcPr>
                 </a:tc>
               </a:tr>
-              <a:tr h="609600">
+              <a:tr h="590550">
                 <a:tc>
                   <a:txBody>
                     <a:bodyPr/>
@@ -15446,7 +15446,7 @@
                   </a:tcPr>
                 </a:tc>
               </a:tr>
-              <a:tr h="609600">
+              <a:tr h="590550">
                 <a:tc>
                   <a:txBody>
                     <a:bodyPr/>
@@ -16202,7 +16202,7 @@
           </p:nvPr>
         </p:nvGraphicFramePr>
         <p:xfrm>
-          <a:off x="6947154" y="2104644"/>
+          <a:off x="6947154" y="2044319"/>
           <a:ext cx="4023360" cy="914400"/>
         </p:xfrm>
         <a:graphic>
@@ -16215,7 +16215,7 @@
                 <a:gridCol w="1005840"/>
                 <a:gridCol w="1005840"/>
               </a:tblGrid>
-              <a:tr h="487680">
+              <a:tr h="511810">
                 <a:tc>
                   <a:txBody>
                     <a:bodyPr/>
@@ -16224,7 +16224,7 @@
                       <a:pPr eaLnBrk="0" algn="ctr" indent="0" marL="0">
                         <a:buNone/>
                       </a:pPr>
-                      <a:endParaRPr lang="en-US" sz="2400" dirty="0">
+                      <a:endParaRPr lang="en-US" sz="2600" dirty="0">
                         <a:latin typeface="맑은 고딕" charset="0"/>
                         <a:ea typeface="맑은 고딕" charset="0"/>
                         <a:cs typeface="맑은 고딕" charset="0"/>
@@ -16282,7 +16282,7 @@
                         <a:buNone/>
                       </a:pPr>
                       <a:r>
-                        <a:rPr lang="en-US" sz="2400" b="1" dirty="0">
+                        <a:rPr lang="en-US" sz="2600" b="1" dirty="0">
                           <a:solidFill>
                             <a:srgbClr val="1F2937"/>
                           </a:solidFill>
@@ -16292,7 +16292,7 @@
                         </a:rPr>
                         <a:t>백</a:t>
                       </a:r>
-                      <a:endParaRPr lang="en-US" sz="2400" dirty="0">
+                      <a:endParaRPr lang="en-US" sz="2600" dirty="0">
                         <a:latin typeface="맑은 고딕" charset="0"/>
                         <a:ea typeface="맑은 고딕" charset="0"/>
                         <a:cs typeface="맑은 고딕" charset="0"/>
@@ -16350,7 +16350,7 @@
                         <a:buNone/>
                       </a:pPr>
                       <a:r>
-                        <a:rPr lang="en-US" sz="2400" b="1" dirty="0">
+                        <a:rPr lang="en-US" sz="2600" b="1" dirty="0">
                           <a:solidFill>
                             <a:srgbClr val="1F2937"/>
                           </a:solidFill>
@@ -16360,7 +16360,7 @@
                         </a:rPr>
                         <a:t>십</a:t>
                       </a:r>
-                      <a:endParaRPr lang="en-US" sz="2400" dirty="0">
+                      <a:endParaRPr lang="en-US" sz="2600" dirty="0">
                         <a:latin typeface="맑은 고딕" charset="0"/>
                         <a:ea typeface="맑은 고딕" charset="0"/>
                         <a:cs typeface="맑은 고딕" charset="0"/>
@@ -16418,7 +16418,7 @@
                         <a:buNone/>
                       </a:pPr>
                       <a:r>
-                        <a:rPr lang="en-US" sz="2400" b="1" dirty="0">
+                        <a:rPr lang="en-US" sz="2600" b="1" dirty="0">
                           <a:solidFill>
                             <a:srgbClr val="1F2937"/>
                           </a:solidFill>
@@ -16428,7 +16428,7 @@
                         </a:rPr>
                         <a:t>일</a:t>
                       </a:r>
-                      <a:endParaRPr lang="en-US" sz="2400" dirty="0">
+                      <a:endParaRPr lang="en-US" sz="2600" dirty="0">
                         <a:latin typeface="맑은 고딕" charset="0"/>
                         <a:ea typeface="맑은 고딕" charset="0"/>
                         <a:cs typeface="맑은 고딕" charset="0"/>
@@ -16478,7 +16478,7 @@
                   </a:tcPr>
                 </a:tc>
               </a:tr>
-              <a:tr h="487680">
+              <a:tr h="511810">
                 <a:tc>
                   <a:txBody>
                     <a:bodyPr/>
@@ -16487,7 +16487,7 @@
                       <a:pPr eaLnBrk="0" algn="ctr" indent="0" marL="0">
                         <a:buNone/>
                       </a:pPr>
-                      <a:endParaRPr lang="en-US" sz="2400" dirty="0">
+                      <a:endParaRPr lang="en-US" sz="2600" dirty="0">
                         <a:latin typeface="맑은 고딕" charset="0"/>
                         <a:ea typeface="맑은 고딕" charset="0"/>
                         <a:cs typeface="맑은 고딕" charset="0"/>
@@ -16545,7 +16545,7 @@
                         <a:buNone/>
                       </a:pPr>
                       <a:r>
-                        <a:rPr lang="en-US" sz="2400" dirty="0">
+                        <a:rPr lang="en-US" sz="2600" dirty="0">
                           <a:solidFill>
                             <a:srgbClr val="1F2937"/>
                           </a:solidFill>
@@ -16555,7 +16555,7 @@
                         </a:rPr>
                         <a:t>□</a:t>
                       </a:r>
-                      <a:endParaRPr lang="en-US" sz="2400" dirty="0">
+                      <a:endParaRPr lang="en-US" sz="2600" dirty="0">
                         <a:latin typeface="맑은 고딕" charset="0"/>
                         <a:ea typeface="맑은 고딕" charset="0"/>
                         <a:cs typeface="맑은 고딕" charset="0"/>
@@ -16613,7 +16613,7 @@
                         <a:buNone/>
                       </a:pPr>
                       <a:r>
-                        <a:rPr lang="en-US" sz="2400" dirty="0">
+                        <a:rPr lang="en-US" sz="2600" dirty="0">
                           <a:solidFill>
                             <a:srgbClr val="1F2937"/>
                           </a:solidFill>
@@ -16623,7 +16623,7 @@
                         </a:rPr>
                         <a:t>□</a:t>
                       </a:r>
-                      <a:endParaRPr lang="en-US" sz="2400" dirty="0">
+                      <a:endParaRPr lang="en-US" sz="2600" dirty="0">
                         <a:latin typeface="맑은 고딕" charset="0"/>
                         <a:ea typeface="맑은 고딕" charset="0"/>
                         <a:cs typeface="맑은 고딕" charset="0"/>
@@ -16680,7 +16680,7 @@
                       <a:pPr eaLnBrk="0" algn="ctr" indent="0" marL="0">
                         <a:buNone/>
                       </a:pPr>
-                      <a:endParaRPr lang="en-US" sz="2400" dirty="0">
+                      <a:endParaRPr lang="en-US" sz="2600" dirty="0">
                         <a:latin typeface="맑은 고딕" charset="0"/>
                         <a:ea typeface="맑은 고딕" charset="0"/>
                         <a:cs typeface="맑은 고딕" charset="0"/>
@@ -16730,7 +16730,7 @@
                   </a:tcPr>
                 </a:tc>
               </a:tr>
-              <a:tr h="487680">
+              <a:tr h="511810">
                 <a:tc>
                   <a:txBody>
                     <a:bodyPr/>
@@ -16739,7 +16739,7 @@
                       <a:pPr eaLnBrk="0" algn="ctr" indent="0" marL="0">
                         <a:buNone/>
                       </a:pPr>
-                      <a:endParaRPr lang="en-US" sz="2400" dirty="0">
+                      <a:endParaRPr lang="en-US" sz="2600" dirty="0">
                         <a:latin typeface="맑은 고딕" charset="0"/>
                         <a:ea typeface="맑은 고딕" charset="0"/>
                         <a:cs typeface="맑은 고딕" charset="0"/>
@@ -16797,7 +16797,7 @@
                         <a:buNone/>
                       </a:pPr>
                       <a:r>
-                        <a:rPr lang="en-US" sz="2400" dirty="0">
+                        <a:rPr lang="en-US" sz="2600" dirty="0">
                           <a:solidFill>
                             <a:srgbClr val="1F2937"/>
                           </a:solidFill>
@@ -16807,7 +16807,7 @@
                         </a:rPr>
                         <a:t>4</a:t>
                       </a:r>
-                      <a:endParaRPr lang="en-US" sz="2400" dirty="0">
+                      <a:endParaRPr lang="en-US" sz="2600" dirty="0">
                         <a:latin typeface="맑은 고딕" charset="0"/>
                         <a:ea typeface="맑은 고딕" charset="0"/>
                         <a:cs typeface="맑은 고딕" charset="0"/>
@@ -16865,7 +16865,7 @@
                         <a:buNone/>
                       </a:pPr>
                       <a:r>
-                        <a:rPr lang="en-US" sz="2400" dirty="0">
+                        <a:rPr lang="en-US" sz="2600" dirty="0">
                           <a:solidFill>
                             <a:srgbClr val="1F2937"/>
                           </a:solidFill>
@@ -16875,7 +16875,7 @@
                         </a:rPr>
                         <a:t>5</a:t>
                       </a:r>
-                      <a:endParaRPr lang="en-US" sz="2400" dirty="0">
+                      <a:endParaRPr lang="en-US" sz="2600" dirty="0">
                         <a:latin typeface="맑은 고딕" charset="0"/>
                         <a:ea typeface="맑은 고딕" charset="0"/>
                         <a:cs typeface="맑은 고딕" charset="0"/>
@@ -16933,7 +16933,7 @@
                         <a:buNone/>
                       </a:pPr>
                       <a:r>
-                        <a:rPr lang="en-US" sz="2400" dirty="0">
+                        <a:rPr lang="en-US" sz="2600" dirty="0">
                           <a:solidFill>
                             <a:srgbClr val="1F2937"/>
                           </a:solidFill>
@@ -16943,7 +16943,7 @@
                         </a:rPr>
                         <a:t>7</a:t>
                       </a:r>
-                      <a:endParaRPr lang="en-US" sz="2400" dirty="0">
+                      <a:endParaRPr lang="en-US" sz="2600" dirty="0">
                         <a:latin typeface="맑은 고딕" charset="0"/>
                         <a:ea typeface="맑은 고딕" charset="0"/>
                         <a:cs typeface="맑은 고딕" charset="0"/>
@@ -16993,7 +16993,7 @@
                   </a:tcPr>
                 </a:tc>
               </a:tr>
-              <a:tr h="487680">
+              <a:tr h="511810">
                 <a:tc>
                   <a:txBody>
                     <a:bodyPr/>
@@ -17003,7 +17003,7 @@
                         <a:buNone/>
                       </a:pPr>
                       <a:r>
-                        <a:rPr lang="en-US" sz="2400" dirty="0">
+                        <a:rPr lang="en-US" sz="2600" dirty="0">
                           <a:solidFill>
                             <a:srgbClr val="1F2937"/>
                           </a:solidFill>
@@ -17013,7 +17013,7 @@
                         </a:rPr>
                         <a:t>+</a:t>
                       </a:r>
-                      <a:endParaRPr lang="en-US" sz="2400" dirty="0">
+                      <a:endParaRPr lang="en-US" sz="2600" dirty="0">
                         <a:latin typeface="맑은 고딕" charset="0"/>
                         <a:ea typeface="맑은 고딕" charset="0"/>
                         <a:cs typeface="맑은 고딕" charset="0"/>
@@ -17071,7 +17071,7 @@
                         <a:buNone/>
                       </a:pPr>
                       <a:r>
-                        <a:rPr lang="en-US" sz="2400" dirty="0">
+                        <a:rPr lang="en-US" sz="2600" dirty="0">
                           <a:solidFill>
                             <a:srgbClr val="1F2937"/>
                           </a:solidFill>
@@ -17081,7 +17081,7 @@
                         </a:rPr>
                         <a:t>3</a:t>
                       </a:r>
-                      <a:endParaRPr lang="en-US" sz="2400" dirty="0">
+                      <a:endParaRPr lang="en-US" sz="2600" dirty="0">
                         <a:latin typeface="맑은 고딕" charset="0"/>
                         <a:ea typeface="맑은 고딕" charset="0"/>
                         <a:cs typeface="맑은 고딕" charset="0"/>
@@ -17139,7 +17139,7 @@
                         <a:buNone/>
                       </a:pPr>
                       <a:r>
-                        <a:rPr lang="en-US" sz="2400" dirty="0">
+                        <a:rPr lang="en-US" sz="2600" dirty="0">
                           <a:solidFill>
                             <a:srgbClr val="1F2937"/>
                           </a:solidFill>
@@ -17149,7 +17149,7 @@
                         </a:rPr>
                         <a:t>6</a:t>
                       </a:r>
-                      <a:endParaRPr lang="en-US" sz="2400" dirty="0">
+                      <a:endParaRPr lang="en-US" sz="2600" dirty="0">
                         <a:latin typeface="맑은 고딕" charset="0"/>
                         <a:ea typeface="맑은 고딕" charset="0"/>
                         <a:cs typeface="맑은 고딕" charset="0"/>
@@ -17207,7 +17207,7 @@
                         <a:buNone/>
                       </a:pPr>
                       <a:r>
-                        <a:rPr lang="en-US" sz="2400" dirty="0">
+                        <a:rPr lang="en-US" sz="2600" dirty="0">
                           <a:solidFill>
                             <a:srgbClr val="1F2937"/>
                           </a:solidFill>
@@ -17217,7 +17217,7 @@
                         </a:rPr>
                         <a:t>8</a:t>
                       </a:r>
-                      <a:endParaRPr lang="en-US" sz="2400" dirty="0">
+                      <a:endParaRPr lang="en-US" sz="2600" dirty="0">
                         <a:latin typeface="맑은 고딕" charset="0"/>
                         <a:ea typeface="맑은 고딕" charset="0"/>
                         <a:cs typeface="맑은 고딕" charset="0"/>
@@ -17267,7 +17267,7 @@
                   </a:tcPr>
                 </a:tc>
               </a:tr>
-              <a:tr h="487680">
+              <a:tr h="511810">
                 <a:tc>
                   <a:txBody>
                     <a:bodyPr/>
@@ -17276,7 +17276,7 @@
                       <a:pPr eaLnBrk="0" algn="ctr" indent="0" marL="0">
                         <a:buNone/>
                       </a:pPr>
-                      <a:endParaRPr lang="en-US" sz="2400" dirty="0">
+                      <a:endParaRPr lang="en-US" sz="2600" dirty="0">
                         <a:latin typeface="맑은 고딕" charset="0"/>
                         <a:ea typeface="맑은 고딕" charset="0"/>
                         <a:cs typeface="맑은 고딕" charset="0"/>
@@ -17334,7 +17334,7 @@
                         <a:buNone/>
                       </a:pPr>
                       <a:r>
-                        <a:rPr lang="en-US" sz="2400" dirty="0">
+                        <a:rPr lang="en-US" sz="2600" dirty="0">
                           <a:solidFill>
                             <a:srgbClr val="1F2937"/>
                           </a:solidFill>
@@ -17344,7 +17344,7 @@
                         </a:rPr>
                         <a:t>□</a:t>
                       </a:r>
-                      <a:endParaRPr lang="en-US" sz="2400" dirty="0">
+                      <a:endParaRPr lang="en-US" sz="2600" dirty="0">
                         <a:latin typeface="맑은 고딕" charset="0"/>
                         <a:ea typeface="맑은 고딕" charset="0"/>
                         <a:cs typeface="맑은 고딕" charset="0"/>
@@ -17402,7 +17402,7 @@
                         <a:buNone/>
                       </a:pPr>
                       <a:r>
-                        <a:rPr lang="en-US" sz="2400" dirty="0">
+                        <a:rPr lang="en-US" sz="2600" dirty="0">
                           <a:solidFill>
                             <a:srgbClr val="1F2937"/>
                           </a:solidFill>
@@ -17412,7 +17412,7 @@
                         </a:rPr>
                         <a:t>□</a:t>
                       </a:r>
-                      <a:endParaRPr lang="en-US" sz="2400" dirty="0">
+                      <a:endParaRPr lang="en-US" sz="2600" dirty="0">
                         <a:latin typeface="맑은 고딕" charset="0"/>
                         <a:ea typeface="맑은 고딕" charset="0"/>
                         <a:cs typeface="맑은 고딕" charset="0"/>
@@ -17470,7 +17470,7 @@
                         <a:buNone/>
                       </a:pPr>
                       <a:r>
-                        <a:rPr lang="en-US" sz="2400" dirty="0">
+                        <a:rPr lang="en-US" sz="2600" dirty="0">
                           <a:solidFill>
                             <a:srgbClr val="1F2937"/>
                           </a:solidFill>
@@ -17480,7 +17480,7 @@
                         </a:rPr>
                         <a:t>□</a:t>
                       </a:r>
-                      <a:endParaRPr lang="en-US" sz="2400" dirty="0">
+                      <a:endParaRPr lang="en-US" sz="2600" dirty="0">
                         <a:latin typeface="맑은 고딕" charset="0"/>
                         <a:ea typeface="맑은 고딕" charset="0"/>
                         <a:cs typeface="맑은 고딕" charset="0"/>
